--- a/prompt_engineering/pe-2-techniques-v2.pptx
+++ b/prompt_engineering/pe-2-techniques-v2.pptx
@@ -5,7 +5,7 @@
     <p:sldMasterId id="2147483648" r:id="rId1"/>
   </p:sldMasterIdLst>
   <p:handoutMasterIdLst>
-    <p:handoutMasterId r:id="rId25"/>
+    <p:handoutMasterId r:id="rId27"/>
   </p:handoutMasterIdLst>
   <p:sldIdLst>
     <p:sldId id="257" r:id="rId2"/>
@@ -25,12 +25,14 @@
     <p:sldId id="267" r:id="rId16"/>
     <p:sldId id="268" r:id="rId17"/>
     <p:sldId id="279" r:id="rId18"/>
-    <p:sldId id="270" r:id="rId19"/>
-    <p:sldId id="271" r:id="rId20"/>
-    <p:sldId id="273" r:id="rId21"/>
-    <p:sldId id="274" r:id="rId22"/>
-    <p:sldId id="272" r:id="rId23"/>
-    <p:sldId id="269" r:id="rId24"/>
+    <p:sldId id="280" r:id="rId19"/>
+    <p:sldId id="281" r:id="rId20"/>
+    <p:sldId id="270" r:id="rId21"/>
+    <p:sldId id="271" r:id="rId22"/>
+    <p:sldId id="273" r:id="rId23"/>
+    <p:sldId id="274" r:id="rId24"/>
+    <p:sldId id="272" r:id="rId25"/>
+    <p:sldId id="269" r:id="rId26"/>
   </p:sldIdLst>
   <p:sldSz cx="12192000" cy="6858000"/>
   <p:notesSz cx="6858000" cy="9144000"/>
@@ -234,7 +236,7 @@
           <a:p>
             <a:fld id="{7BAEECA8-D063-486F-AE31-5020270C1449}" type="datetimeFigureOut">
               <a:rPr lang="en-US" smtClean="0"/>
-              <a:t>5/8/2026</a:t>
+              <a:t>5/27/2026</a:t>
             </a:fld>
             <a:endParaRPr lang="en-US"/>
           </a:p>
@@ -476,7 +478,7 @@
           <a:p>
             <a:fld id="{6383FAE1-13DE-4511-8C1B-C8AFB720664C}" type="datetimeFigureOut">
               <a:rPr lang="en-US" smtClean="0"/>
-              <a:t>5/8/2026</a:t>
+              <a:t>5/27/2026</a:t>
             </a:fld>
             <a:endParaRPr lang="en-US"/>
           </a:p>
@@ -674,7 +676,7 @@
           <a:p>
             <a:fld id="{6383FAE1-13DE-4511-8C1B-C8AFB720664C}" type="datetimeFigureOut">
               <a:rPr lang="en-US" smtClean="0"/>
-              <a:t>5/8/2026</a:t>
+              <a:t>5/27/2026</a:t>
             </a:fld>
             <a:endParaRPr lang="en-US"/>
           </a:p>
@@ -882,7 +884,7 @@
           <a:p>
             <a:fld id="{6383FAE1-13DE-4511-8C1B-C8AFB720664C}" type="datetimeFigureOut">
               <a:rPr lang="en-US" smtClean="0"/>
-              <a:t>5/8/2026</a:t>
+              <a:t>5/27/2026</a:t>
             </a:fld>
             <a:endParaRPr lang="en-US"/>
           </a:p>
@@ -1080,7 +1082,7 @@
           <a:p>
             <a:fld id="{6383FAE1-13DE-4511-8C1B-C8AFB720664C}" type="datetimeFigureOut">
               <a:rPr lang="en-US" smtClean="0"/>
-              <a:t>5/8/2026</a:t>
+              <a:t>5/27/2026</a:t>
             </a:fld>
             <a:endParaRPr lang="en-US"/>
           </a:p>
@@ -1355,7 +1357,7 @@
           <a:p>
             <a:fld id="{6383FAE1-13DE-4511-8C1B-C8AFB720664C}" type="datetimeFigureOut">
               <a:rPr lang="en-US" smtClean="0"/>
-              <a:t>5/8/2026</a:t>
+              <a:t>5/27/2026</a:t>
             </a:fld>
             <a:endParaRPr lang="en-US"/>
           </a:p>
@@ -1620,7 +1622,7 @@
           <a:p>
             <a:fld id="{6383FAE1-13DE-4511-8C1B-C8AFB720664C}" type="datetimeFigureOut">
               <a:rPr lang="en-US" smtClean="0"/>
-              <a:t>5/8/2026</a:t>
+              <a:t>5/27/2026</a:t>
             </a:fld>
             <a:endParaRPr lang="en-US"/>
           </a:p>
@@ -2032,7 +2034,7 @@
           <a:p>
             <a:fld id="{6383FAE1-13DE-4511-8C1B-C8AFB720664C}" type="datetimeFigureOut">
               <a:rPr lang="en-US" smtClean="0"/>
-              <a:t>5/8/2026</a:t>
+              <a:t>5/27/2026</a:t>
             </a:fld>
             <a:endParaRPr lang="en-US"/>
           </a:p>
@@ -2173,7 +2175,7 @@
           <a:p>
             <a:fld id="{6383FAE1-13DE-4511-8C1B-C8AFB720664C}" type="datetimeFigureOut">
               <a:rPr lang="en-US" smtClean="0"/>
-              <a:t>5/8/2026</a:t>
+              <a:t>5/27/2026</a:t>
             </a:fld>
             <a:endParaRPr lang="en-US"/>
           </a:p>
@@ -2286,7 +2288,7 @@
           <a:p>
             <a:fld id="{6383FAE1-13DE-4511-8C1B-C8AFB720664C}" type="datetimeFigureOut">
               <a:rPr lang="en-US" smtClean="0"/>
-              <a:t>5/8/2026</a:t>
+              <a:t>5/27/2026</a:t>
             </a:fld>
             <a:endParaRPr lang="en-US"/>
           </a:p>
@@ -2597,7 +2599,7 @@
           <a:p>
             <a:fld id="{6383FAE1-13DE-4511-8C1B-C8AFB720664C}" type="datetimeFigureOut">
               <a:rPr lang="en-US" smtClean="0"/>
-              <a:t>5/8/2026</a:t>
+              <a:t>5/27/2026</a:t>
             </a:fld>
             <a:endParaRPr lang="en-US"/>
           </a:p>
@@ -2888,7 +2890,7 @@
           <a:p>
             <a:fld id="{6383FAE1-13DE-4511-8C1B-C8AFB720664C}" type="datetimeFigureOut">
               <a:rPr lang="en-US" smtClean="0"/>
-              <a:t>5/8/2026</a:t>
+              <a:t>5/27/2026</a:t>
             </a:fld>
             <a:endParaRPr lang="en-US"/>
           </a:p>
@@ -3132,7 +3134,7 @@
           <a:p>
             <a:fld id="{6383FAE1-13DE-4511-8C1B-C8AFB720664C}" type="datetimeFigureOut">
               <a:rPr lang="en-US" smtClean="0"/>
-              <a:t>5/8/2026</a:t>
+              <a:t>5/27/2026</a:t>
             </a:fld>
             <a:endParaRPr lang="en-US"/>
           </a:p>
@@ -3705,8 +3707,8 @@
         </p:nvSpPr>
         <p:spPr>
           <a:xfrm>
-            <a:off x="3028950" y="85725"/>
-            <a:ext cx="6400800" cy="1323439"/>
+            <a:off x="740664" y="1612773"/>
+            <a:ext cx="9637776" cy="3785652"/>
           </a:xfrm>
           <a:prstGeom prst="rect">
             <a:avLst/>
@@ -3721,6 +3723,62 @@
           <a:p>
             <a:pPr algn="ctr"/>
             <a:r>
+              <a:rPr lang="en-US" sz="4000" b="1" dirty="0">
+                <a:solidFill>
+                  <a:schemeClr val="accent6">
+                    <a:lumMod val="60000"/>
+                    <a:lumOff val="40000"/>
+                  </a:schemeClr>
+                </a:solidFill>
+              </a:rPr>
+              <a:t>Prompt Engineering</a:t>
+            </a:r>
+          </a:p>
+          <a:p>
+            <a:pPr algn="ctr"/>
+            <a:r>
+              <a:rPr lang="en-US" sz="4000" b="1" dirty="0">
+                <a:solidFill>
+                  <a:schemeClr val="accent6">
+                    <a:lumMod val="60000"/>
+                    <a:lumOff val="40000"/>
+                  </a:schemeClr>
+                </a:solidFill>
+              </a:rPr>
+              <a:t>Techniques</a:t>
+            </a:r>
+          </a:p>
+          <a:p>
+            <a:pPr algn="ctr"/>
+            <a:endParaRPr lang="en-US" sz="4000" dirty="0">
+              <a:solidFill>
+                <a:schemeClr val="accent6">
+                  <a:lumMod val="60000"/>
+                  <a:lumOff val="40000"/>
+                </a:schemeClr>
+              </a:solidFill>
+            </a:endParaRPr>
+          </a:p>
+          <a:p>
+            <a:pPr algn="ctr"/>
+            <a:r>
+              <a:rPr lang="en-US" sz="4000" kern="100" dirty="0">
+                <a:solidFill>
+                  <a:schemeClr val="accent6">
+                    <a:lumMod val="60000"/>
+                    <a:lumOff val="40000"/>
+                  </a:schemeClr>
+                </a:solidFill>
+                <a:latin typeface="Calibri" panose="020F0502020204030204" pitchFamily="34" charset="0"/>
+                <a:ea typeface="Calibri" panose="020F0502020204030204" pitchFamily="34" charset="0"/>
+                <a:cs typeface="Times New Roman" panose="02020603050405020304" pitchFamily="18" charset="0"/>
+              </a:rPr>
+              <a:t>Few-Shot Prompting</a:t>
+            </a:r>
+          </a:p>
+          <a:p>
+            <a:pPr algn="ctr"/>
+            <a:r>
               <a:rPr lang="en-US" sz="4000" dirty="0">
                 <a:solidFill>
                   <a:schemeClr val="accent6">
@@ -3729,7 +3787,29 @@
                   </a:schemeClr>
                 </a:solidFill>
               </a:rPr>
-              <a:t>Prompt Engineering</a:t>
+              <a:t>Chain-of-Thought (</a:t>
+            </a:r>
+            <a:r>
+              <a:rPr lang="en-US" sz="4000" dirty="0" err="1">
+                <a:solidFill>
+                  <a:schemeClr val="accent6">
+                    <a:lumMod val="60000"/>
+                    <a:lumOff val="40000"/>
+                  </a:schemeClr>
+                </a:solidFill>
+              </a:rPr>
+              <a:t>CoT</a:t>
+            </a:r>
+            <a:r>
+              <a:rPr lang="en-US" sz="4000" dirty="0">
+                <a:solidFill>
+                  <a:schemeClr val="accent6">
+                    <a:lumMod val="60000"/>
+                    <a:lumOff val="40000"/>
+                  </a:schemeClr>
+                </a:solidFill>
+              </a:rPr>
+              <a:t>) Prompting</a:t>
             </a:r>
           </a:p>
           <a:p>
@@ -3743,7 +3823,7 @@
                   </a:schemeClr>
                 </a:solidFill>
               </a:rPr>
-              <a:t>Techniques</a:t>
+              <a:t>Role Prompting</a:t>
             </a:r>
           </a:p>
         </p:txBody>
@@ -3849,9 +3929,9 @@
           </a:p>
           <a:p>
             <a:r>
-              <a:rPr lang="en-US" sz="2400" dirty="0">
-                <a:solidFill>
-                  <a:schemeClr val="accent6">
+              <a:rPr lang="en-US" sz="2400" b="1" dirty="0">
+                <a:solidFill>
+                  <a:schemeClr val="accent4">
                     <a:lumMod val="60000"/>
                     <a:lumOff val="40000"/>
                   </a:schemeClr>
@@ -3895,7 +3975,7 @@
           </a:p>
           <a:p>
             <a:r>
-              <a:rPr lang="en-US" sz="2400" dirty="0">
+              <a:rPr lang="en-US" sz="2400" b="1" dirty="0">
                 <a:solidFill>
                   <a:schemeClr val="accent6">
                     <a:lumMod val="60000"/>
@@ -4011,7 +4091,7 @@
             <a:r>
               <a:rPr lang="en-US" sz="2400" dirty="0">
                 <a:solidFill>
-                  <a:schemeClr val="accent6">
+                  <a:schemeClr val="accent4">
                     <a:lumMod val="60000"/>
                     <a:lumOff val="40000"/>
                   </a:schemeClr>
@@ -4022,7 +4102,7 @@
             <a:r>
               <a:rPr lang="en-US" sz="2400" b="1" dirty="0">
                 <a:solidFill>
-                  <a:schemeClr val="accent6">
+                  <a:schemeClr val="accent4">
                     <a:lumMod val="60000"/>
                     <a:lumOff val="40000"/>
                   </a:schemeClr>
@@ -4035,7 +4115,7 @@
             <a:r>
               <a:rPr lang="en-US" sz="2400" dirty="0">
                 <a:solidFill>
-                  <a:schemeClr val="accent6">
+                  <a:schemeClr val="accent4">
                     <a:lumMod val="60000"/>
                     <a:lumOff val="40000"/>
                   </a:schemeClr>
@@ -4298,6 +4378,36 @@
           </a:p>
         </p:txBody>
       </p:sp>
+      <p:pic>
+        <p:nvPicPr>
+          <p:cNvPr id="3" name="Picture 2">
+            <a:extLst>
+              <a:ext uri="{FF2B5EF4-FFF2-40B4-BE49-F238E27FC236}">
+                <a16:creationId xmlns:a16="http://schemas.microsoft.com/office/drawing/2014/main" id="{D59C88AE-DBB7-9BF1-4BAE-FF6C49FCA609}"/>
+              </a:ext>
+            </a:extLst>
+          </p:cNvPr>
+          <p:cNvPicPr>
+            <a:picLocks noChangeAspect="1"/>
+          </p:cNvPicPr>
+          <p:nvPr/>
+        </p:nvPicPr>
+        <p:blipFill>
+          <a:blip r:embed="rId2"/>
+          <a:stretch>
+            <a:fillRect/>
+          </a:stretch>
+        </p:blipFill>
+        <p:spPr>
+          <a:xfrm>
+            <a:off x="5351263" y="3959352"/>
+            <a:ext cx="3633317" cy="2224031"/>
+          </a:xfrm>
+          <a:prstGeom prst="rect">
+            <a:avLst/>
+          </a:prstGeom>
+        </p:spPr>
+      </p:pic>
     </p:spTree>
     <p:extLst>
       <p:ext uri="{BB962C8B-B14F-4D97-AF65-F5344CB8AC3E}">
@@ -4349,7 +4459,7 @@
         <p:spPr>
           <a:xfrm>
             <a:off x="182880" y="312874"/>
-            <a:ext cx="11713464" cy="5632311"/>
+            <a:ext cx="4956048" cy="3785652"/>
           </a:xfrm>
           <a:prstGeom prst="rect">
             <a:avLst/>
@@ -4411,7 +4521,7 @@
             <a:r>
               <a:rPr lang="en-US" sz="2400" dirty="0">
                 <a:solidFill>
-                  <a:schemeClr val="accent6">
+                  <a:schemeClr val="accent4">
                     <a:lumMod val="60000"/>
                     <a:lumOff val="40000"/>
                   </a:schemeClr>
@@ -4422,7 +4532,7 @@
             <a:r>
               <a:rPr lang="en-US" sz="2400" b="1" dirty="0">
                 <a:solidFill>
-                  <a:schemeClr val="accent6">
+                  <a:schemeClr val="accent4">
                     <a:lumMod val="60000"/>
                     <a:lumOff val="40000"/>
                   </a:schemeClr>
@@ -4433,7 +4543,7 @@
             <a:r>
               <a:rPr lang="en-US" sz="2400" dirty="0">
                 <a:solidFill>
-                  <a:schemeClr val="accent6">
+                  <a:schemeClr val="accent4">
                     <a:lumMod val="60000"/>
                     <a:lumOff val="40000"/>
                   </a:schemeClr>
@@ -4444,7 +4554,7 @@
             <a:r>
               <a:rPr lang="en-US" sz="2400" b="1" dirty="0">
                 <a:solidFill>
-                  <a:schemeClr val="accent6">
+                  <a:schemeClr val="accent4">
                     <a:lumMod val="60000"/>
                     <a:lumOff val="40000"/>
                   </a:schemeClr>
@@ -4454,7 +4564,7 @@
             </a:r>
             <a:endParaRPr lang="en-US" sz="2400" dirty="0">
               <a:solidFill>
-                <a:schemeClr val="accent6">
+                <a:schemeClr val="accent4">
                   <a:lumMod val="60000"/>
                   <a:lumOff val="40000"/>
                 </a:schemeClr>
@@ -4465,115 +4575,60 @@
             <a:r>
               <a:rPr lang="en-US" sz="2400" dirty="0">
                 <a:solidFill>
-                  <a:schemeClr val="accent6">
-                    <a:lumMod val="60000"/>
-                    <a:lumOff val="40000"/>
-                  </a:schemeClr>
-                </a:solidFill>
-              </a:rPr>
-              <a:t>I have 10 apples. I give 2 to a neighbor and 2 to a repairman. Then I buy 5 more and eat 1. How many do I have left? </a:t>
-            </a:r>
-          </a:p>
-          <a:p>
-            <a:endParaRPr lang="en-US" sz="2400" dirty="0">
-              <a:solidFill>
-                <a:schemeClr val="accent6">
-                  <a:lumMod val="60000"/>
-                  <a:lumOff val="40000"/>
-                </a:schemeClr>
-              </a:solidFill>
-            </a:endParaRPr>
-          </a:p>
-          <a:p>
-            <a:r>
-              <a:rPr lang="en-US" sz="2400" dirty="0">
-                <a:solidFill>
-                  <a:schemeClr val="accent6">
-                    <a:lumMod val="60000"/>
-                    <a:lumOff val="40000"/>
-                  </a:schemeClr>
-                </a:solidFill>
-              </a:rPr>
-              <a:t>Typical AI Response:</a:t>
-            </a:r>
-          </a:p>
-          <a:p>
-            <a:r>
-              <a:rPr lang="en-US" sz="2400" dirty="0">
-                <a:solidFill>
-                  <a:schemeClr val="accent6">
-                    <a:lumMod val="60000"/>
-                    <a:lumOff val="40000"/>
-                  </a:schemeClr>
-                </a:solidFill>
-              </a:rPr>
-              <a:t>Step1: You started with 10 apples.</a:t>
-            </a:r>
-          </a:p>
-          <a:p>
-            <a:r>
-              <a:rPr lang="en-US" sz="2400" dirty="0">
-                <a:solidFill>
-                  <a:schemeClr val="accent6">
-                    <a:lumMod val="60000"/>
-                    <a:lumOff val="40000"/>
-                  </a:schemeClr>
-                </a:solidFill>
-              </a:rPr>
-              <a:t>Step2:  You gave away 2 to the neighbor and 2 to the repairman (10 - 4 = 6 apples left).</a:t>
-            </a:r>
-          </a:p>
-          <a:p>
-            <a:r>
-              <a:rPr lang="en-US" sz="2400" dirty="0">
-                <a:solidFill>
-                  <a:schemeClr val="accent6">
-                    <a:lumMod val="60000"/>
-                    <a:lumOff val="40000"/>
-                  </a:schemeClr>
-                </a:solidFill>
-              </a:rPr>
-              <a:t>Step3: You bought 5 more (6 + 5 = 11 apples).</a:t>
-            </a:r>
-          </a:p>
-          <a:p>
-            <a:r>
-              <a:rPr lang="en-US" sz="2400" dirty="0">
-                <a:solidFill>
-                  <a:schemeClr val="accent6">
-                    <a:lumMod val="60000"/>
-                    <a:lumOff val="40000"/>
-                  </a:schemeClr>
-                </a:solidFill>
-              </a:rPr>
-              <a:t>Step4: You ate 1 (11 - 1 = 10 apples).</a:t>
-            </a:r>
-          </a:p>
-          <a:p>
-            <a:endParaRPr lang="en-US" sz="2400" dirty="0">
-              <a:solidFill>
-                <a:schemeClr val="accent6">
-                  <a:lumMod val="60000"/>
-                  <a:lumOff val="40000"/>
-                </a:schemeClr>
-              </a:solidFill>
-            </a:endParaRPr>
-          </a:p>
-          <a:p>
-            <a:r>
-              <a:rPr lang="en-US" sz="2400" dirty="0">
-                <a:solidFill>
-                  <a:schemeClr val="accent6">
-                    <a:lumMod val="60000"/>
-                    <a:lumOff val="40000"/>
-                  </a:schemeClr>
-                </a:solidFill>
-              </a:rPr>
-              <a:t>Final Answer: 10 apples.</a:t>
+                  <a:schemeClr val="accent4">
+                    <a:lumMod val="60000"/>
+                    <a:lumOff val="40000"/>
+                  </a:schemeClr>
+                </a:solidFill>
+              </a:rPr>
+              <a:t>I have 10 apples. I give 2 to a neighbor and 2 to a repairman. Then I buy 5 more and eat 1. </a:t>
+            </a:r>
+          </a:p>
+          <a:p>
+            <a:r>
+              <a:rPr lang="en-US" sz="2400" dirty="0">
+                <a:solidFill>
+                  <a:schemeClr val="accent4">
+                    <a:lumMod val="60000"/>
+                    <a:lumOff val="40000"/>
+                  </a:schemeClr>
+                </a:solidFill>
+              </a:rPr>
+              <a:t>How many do I have left? </a:t>
             </a:r>
           </a:p>
         </p:txBody>
       </p:sp>
+      <p:pic>
+        <p:nvPicPr>
+          <p:cNvPr id="3" name="Picture 2">
+            <a:extLst>
+              <a:ext uri="{FF2B5EF4-FFF2-40B4-BE49-F238E27FC236}">
+                <a16:creationId xmlns:a16="http://schemas.microsoft.com/office/drawing/2014/main" id="{C3017B84-9ED9-1E5E-521F-50C7D8F580AA}"/>
+              </a:ext>
+            </a:extLst>
+          </p:cNvPr>
+          <p:cNvPicPr>
+            <a:picLocks noChangeAspect="1"/>
+          </p:cNvPicPr>
+          <p:nvPr/>
+        </p:nvPicPr>
+        <p:blipFill>
+          <a:blip r:embed="rId2"/>
+          <a:stretch>
+            <a:fillRect/>
+          </a:stretch>
+        </p:blipFill>
+        <p:spPr>
+          <a:xfrm>
+            <a:off x="6375823" y="137160"/>
+            <a:ext cx="5005935" cy="6720840"/>
+          </a:xfrm>
+          <a:prstGeom prst="rect">
+            <a:avLst/>
+          </a:prstGeom>
+        </p:spPr>
+      </p:pic>
     </p:spTree>
     <p:extLst>
       <p:ext uri="{BB962C8B-B14F-4D97-AF65-F5344CB8AC3E}">
@@ -4709,7 +4764,29 @@
                   </a:schemeClr>
                 </a:solidFill>
               </a:rPr>
-              <a:t>“Explain step-by-step”</a:t>
+              <a:t>“</a:t>
+            </a:r>
+            <a:r>
+              <a:rPr lang="en-US" sz="2400" b="1" dirty="0">
+                <a:solidFill>
+                  <a:schemeClr val="accent6">
+                    <a:lumMod val="60000"/>
+                    <a:lumOff val="40000"/>
+                  </a:schemeClr>
+                </a:solidFill>
+              </a:rPr>
+              <a:t>Explain step-by-step</a:t>
+            </a:r>
+            <a:r>
+              <a:rPr lang="en-US" sz="2400" dirty="0">
+                <a:solidFill>
+                  <a:schemeClr val="accent6">
+                    <a:lumMod val="60000"/>
+                    <a:lumOff val="40000"/>
+                  </a:schemeClr>
+                </a:solidFill>
+              </a:rPr>
+              <a:t>”</a:t>
             </a:r>
           </a:p>
           <a:p>
@@ -4718,7 +4795,7 @@
               <a:buChar char="•"/>
             </a:pPr>
             <a:r>
-              <a:rPr lang="en-US" sz="2400" dirty="0">
+              <a:rPr lang="en-US" sz="2400" b="1" dirty="0">
                 <a:solidFill>
                   <a:schemeClr val="accent6">
                     <a:lumMod val="60000"/>
@@ -4735,7 +4812,7 @@
               <a:buChar char="•"/>
             </a:pPr>
             <a:r>
-              <a:rPr lang="en-US" sz="2400" dirty="0">
+              <a:rPr lang="en-US" sz="2400" b="1" dirty="0">
                 <a:solidFill>
                   <a:schemeClr val="accent6">
                     <a:lumMod val="60000"/>
@@ -4752,7 +4829,7 @@
               <a:buChar char="•"/>
             </a:pPr>
             <a:r>
-              <a:rPr lang="en-US" sz="2400" dirty="0">
+              <a:rPr lang="en-US" sz="2400" b="1" dirty="0">
                 <a:solidFill>
                   <a:schemeClr val="accent6">
                     <a:lumMod val="60000"/>
@@ -4838,7 +4915,7 @@
                   </a:schemeClr>
                 </a:solidFill>
               </a:rPr>
-              <a:t>Why Chain-of-Thought Prompting is Important</a:t>
+              <a:t>Why Chain-of-Thought Prompting is Important ?</a:t>
             </a:r>
           </a:p>
           <a:p>
@@ -5101,7 +5178,7 @@
         <p:spPr>
           <a:xfrm>
             <a:off x="182880" y="312874"/>
-            <a:ext cx="11713464" cy="4154984"/>
+            <a:ext cx="11713464" cy="1938992"/>
           </a:xfrm>
           <a:prstGeom prst="rect">
             <a:avLst/>
@@ -5192,27 +5269,114 @@
               <a:t> before asking it to perform a task.</a:t>
             </a:r>
           </a:p>
-          <a:p>
-            <a:endParaRPr lang="en-US" sz="2400" dirty="0">
-              <a:solidFill>
-                <a:schemeClr val="accent6">
-                  <a:lumMod val="60000"/>
-                  <a:lumOff val="40000"/>
-                </a:schemeClr>
-              </a:solidFill>
-            </a:endParaRPr>
-          </a:p>
-          <a:p>
-            <a:r>
-              <a:rPr lang="en-US" sz="2400" dirty="0">
-                <a:solidFill>
-                  <a:schemeClr val="accent6">
-                    <a:lumMod val="60000"/>
-                    <a:lumOff val="40000"/>
-                  </a:schemeClr>
-                </a:solidFill>
-              </a:rPr>
-              <a:t>Example:</a:t>
+        </p:txBody>
+      </p:sp>
+      <p:sp>
+        <p:nvSpPr>
+          <p:cNvPr id="3" name="TextBox 2">
+            <a:extLst>
+              <a:ext uri="{FF2B5EF4-FFF2-40B4-BE49-F238E27FC236}">
+                <a16:creationId xmlns:a16="http://schemas.microsoft.com/office/drawing/2014/main" id="{321E870A-C176-CB8A-4173-D6A251331DE8}"/>
+              </a:ext>
+            </a:extLst>
+          </p:cNvPr>
+          <p:cNvSpPr txBox="1"/>
+          <p:nvPr/>
+        </p:nvSpPr>
+        <p:spPr>
+          <a:xfrm>
+            <a:off x="182880" y="2544474"/>
+            <a:ext cx="5033772" cy="1200329"/>
+          </a:xfrm>
+          <a:prstGeom prst="rect">
+            <a:avLst/>
+          </a:prstGeom>
+          <a:noFill/>
+        </p:spPr>
+        <p:txBody>
+          <a:bodyPr wrap="square">
+            <a:spAutoFit/>
+          </a:bodyPr>
+          <a:lstStyle/>
+          <a:p>
+            <a:r>
+              <a:rPr lang="en-US" sz="2400" dirty="0">
+                <a:solidFill>
+                  <a:schemeClr val="accent6">
+                    <a:lumMod val="60000"/>
+                    <a:lumOff val="40000"/>
+                  </a:schemeClr>
+                </a:solidFill>
+              </a:rPr>
+              <a:t>Example (Without Role Prompting):</a:t>
+            </a:r>
+          </a:p>
+          <a:p>
+            <a:r>
+              <a:rPr lang="en-US" sz="2400" dirty="0">
+                <a:solidFill>
+                  <a:schemeClr val="accent4">
+                    <a:lumMod val="60000"/>
+                    <a:lumOff val="40000"/>
+                  </a:schemeClr>
+                </a:solidFill>
+              </a:rPr>
+              <a:t>I want to import a csv file into a list. </a:t>
+            </a:r>
+          </a:p>
+          <a:p>
+            <a:r>
+              <a:rPr lang="en-US" sz="2400" dirty="0">
+                <a:solidFill>
+                  <a:schemeClr val="accent4">
+                    <a:lumMod val="60000"/>
+                    <a:lumOff val="40000"/>
+                  </a:schemeClr>
+                </a:solidFill>
+              </a:rPr>
+              <a:t>Write me a code that would do this. </a:t>
+            </a:r>
+          </a:p>
+        </p:txBody>
+      </p:sp>
+      <p:sp>
+        <p:nvSpPr>
+          <p:cNvPr id="5" name="TextBox 4">
+            <a:extLst>
+              <a:ext uri="{FF2B5EF4-FFF2-40B4-BE49-F238E27FC236}">
+                <a16:creationId xmlns:a16="http://schemas.microsoft.com/office/drawing/2014/main" id="{6E95B3B0-12E2-A7C6-643F-33C74193C3E2}"/>
+              </a:ext>
+            </a:extLst>
+          </p:cNvPr>
+          <p:cNvSpPr txBox="1"/>
+          <p:nvPr/>
+        </p:nvSpPr>
+        <p:spPr>
+          <a:xfrm>
+            <a:off x="6443472" y="2544474"/>
+            <a:ext cx="5033772" cy="2308324"/>
+          </a:xfrm>
+          <a:prstGeom prst="rect">
+            <a:avLst/>
+          </a:prstGeom>
+          <a:noFill/>
+        </p:spPr>
+        <p:txBody>
+          <a:bodyPr wrap="square">
+            <a:spAutoFit/>
+          </a:bodyPr>
+          <a:lstStyle/>
+          <a:p>
+            <a:r>
+              <a:rPr lang="en-US" sz="2400" dirty="0">
+                <a:solidFill>
+                  <a:schemeClr val="accent6">
+                    <a:lumMod val="60000"/>
+                    <a:lumOff val="40000"/>
+                  </a:schemeClr>
+                </a:solidFill>
+              </a:rPr>
+              <a:t>Example (With Role Prompting):</a:t>
             </a:r>
           </a:p>
           <a:p>
@@ -5316,10 +5480,10 @@
       </p:grpSpPr>
       <p:pic>
         <p:nvPicPr>
-          <p:cNvPr id="3" name="Picture 2">
-            <a:extLst>
-              <a:ext uri="{FF2B5EF4-FFF2-40B4-BE49-F238E27FC236}">
-                <a16:creationId xmlns:a16="http://schemas.microsoft.com/office/drawing/2014/main" id="{B95C39E5-E731-51A3-7254-BDC2EBECEAF6}"/>
+          <p:cNvPr id="4" name="Picture 3">
+            <a:extLst>
+              <a:ext uri="{FF2B5EF4-FFF2-40B4-BE49-F238E27FC236}">
+                <a16:creationId xmlns:a16="http://schemas.microsoft.com/office/drawing/2014/main" id="{F6779894-EEED-9FFB-166E-A57AF7AA8175}"/>
               </a:ext>
             </a:extLst>
           </p:cNvPr>
@@ -5336,8 +5500,8 @@
         </p:blipFill>
         <p:spPr>
           <a:xfrm>
-            <a:off x="123231" y="0"/>
-            <a:ext cx="5782482" cy="1286054"/>
+            <a:off x="6455664" y="967685"/>
+            <a:ext cx="4178134" cy="4537115"/>
           </a:xfrm>
           <a:prstGeom prst="rect">
             <a:avLst/>
@@ -5346,10 +5510,10 @@
       </p:pic>
       <p:pic>
         <p:nvPicPr>
-          <p:cNvPr id="6" name="Picture 5">
-            <a:extLst>
-              <a:ext uri="{FF2B5EF4-FFF2-40B4-BE49-F238E27FC236}">
-                <a16:creationId xmlns:a16="http://schemas.microsoft.com/office/drawing/2014/main" id="{FBE35FD2-D998-09CE-E1F7-DCE928E94CC0}"/>
+          <p:cNvPr id="7" name="Picture 6">
+            <a:extLst>
+              <a:ext uri="{FF2B5EF4-FFF2-40B4-BE49-F238E27FC236}">
+                <a16:creationId xmlns:a16="http://schemas.microsoft.com/office/drawing/2014/main" id="{A1D7854E-06A7-1CC4-376A-D2901C1C9250}"/>
               </a:ext>
             </a:extLst>
           </p:cNvPr>
@@ -5366,8 +5530,8 @@
         </p:blipFill>
         <p:spPr>
           <a:xfrm>
-            <a:off x="6517574" y="877824"/>
-            <a:ext cx="5226009" cy="5329837"/>
+            <a:off x="234409" y="1278184"/>
+            <a:ext cx="4115374" cy="1009791"/>
           </a:xfrm>
           <a:prstGeom prst="rect">
             <a:avLst/>
@@ -5395,7 +5559,7 @@
         <p:cNvPr id="1" name="">
           <a:extLst>
             <a:ext uri="{FF2B5EF4-FFF2-40B4-BE49-F238E27FC236}">
-              <a16:creationId xmlns:a16="http://schemas.microsoft.com/office/drawing/2014/main" id="{E4ACE555-C010-2543-DFFC-F5D5D5BD2747}"/>
+              <a16:creationId xmlns:a16="http://schemas.microsoft.com/office/drawing/2014/main" id="{91C22B99-F0D2-69F8-5A22-9A1B892F43CC}"/>
             </a:ext>
           </a:extLst>
         </p:cNvPr>
@@ -5410,219 +5574,100 @@
           <a:chExt cx="0" cy="0"/>
         </a:xfrm>
       </p:grpSpPr>
-      <p:sp>
-        <p:nvSpPr>
-          <p:cNvPr id="4" name="TextBox 3">
-            <a:extLst>
-              <a:ext uri="{FF2B5EF4-FFF2-40B4-BE49-F238E27FC236}">
-                <a16:creationId xmlns:a16="http://schemas.microsoft.com/office/drawing/2014/main" id="{B2C5F2D7-4594-AE38-A9A4-72FEA6A3F207}"/>
-              </a:ext>
-            </a:extLst>
-          </p:cNvPr>
-          <p:cNvSpPr txBox="1"/>
+      <p:pic>
+        <p:nvPicPr>
+          <p:cNvPr id="4" name="Picture 3">
+            <a:extLst>
+              <a:ext uri="{FF2B5EF4-FFF2-40B4-BE49-F238E27FC236}">
+                <a16:creationId xmlns:a16="http://schemas.microsoft.com/office/drawing/2014/main" id="{8D07FD04-CD44-B989-E5A1-542AE33C89F1}"/>
+              </a:ext>
+            </a:extLst>
+          </p:cNvPr>
+          <p:cNvPicPr>
+            <a:picLocks noChangeAspect="1"/>
+          </p:cNvPicPr>
           <p:nvPr/>
-        </p:nvSpPr>
+        </p:nvPicPr>
+        <p:blipFill>
+          <a:blip r:embed="rId2"/>
+          <a:stretch>
+            <a:fillRect/>
+          </a:stretch>
+        </p:blipFill>
         <p:spPr>
           <a:xfrm>
-            <a:off x="182880" y="312874"/>
-            <a:ext cx="11713464" cy="5262979"/>
+            <a:off x="124681" y="213784"/>
+            <a:ext cx="4115374" cy="1905266"/>
           </a:xfrm>
           <a:prstGeom prst="rect">
             <a:avLst/>
           </a:prstGeom>
-          <a:noFill/>
         </p:spPr>
-        <p:txBody>
-          <a:bodyPr wrap="square">
-            <a:spAutoFit/>
-          </a:bodyPr>
-          <a:lstStyle/>
-          <a:p>
-            <a:r>
-              <a:rPr lang="en-US" sz="2400" b="1" dirty="0">
-                <a:solidFill>
-                  <a:schemeClr val="accent6">
-                    <a:lumMod val="60000"/>
-                    <a:lumOff val="40000"/>
-                  </a:schemeClr>
-                </a:solidFill>
-              </a:rPr>
-              <a:t>Example Without Role Prompting</a:t>
-            </a:r>
-            <a:endParaRPr lang="en-US" sz="2400" dirty="0">
-              <a:solidFill>
-                <a:schemeClr val="accent6">
-                  <a:lumMod val="60000"/>
-                  <a:lumOff val="40000"/>
-                </a:schemeClr>
-              </a:solidFill>
-            </a:endParaRPr>
-          </a:p>
-          <a:p>
-            <a:endParaRPr lang="en-US" sz="2400" dirty="0">
-              <a:solidFill>
-                <a:schemeClr val="accent6">
-                  <a:lumMod val="60000"/>
-                  <a:lumOff val="40000"/>
-                </a:schemeClr>
-              </a:solidFill>
-            </a:endParaRPr>
-          </a:p>
-          <a:p>
-            <a:r>
-              <a:rPr lang="en-US" sz="2400" dirty="0">
-                <a:solidFill>
-                  <a:schemeClr val="accent6">
-                    <a:lumMod val="60000"/>
-                    <a:lumOff val="40000"/>
-                  </a:schemeClr>
-                </a:solidFill>
-              </a:rPr>
-              <a:t>Prompt:</a:t>
-            </a:r>
-          </a:p>
-          <a:p>
-            <a:r>
-              <a:rPr lang="en-US" sz="2400" dirty="0">
-                <a:solidFill>
-                  <a:schemeClr val="accent4">
-                    <a:lumMod val="60000"/>
-                    <a:lumOff val="40000"/>
-                  </a:schemeClr>
-                </a:solidFill>
-              </a:rPr>
-              <a:t>Explain API security.</a:t>
-            </a:r>
-          </a:p>
-          <a:p>
-            <a:endParaRPr lang="en-US" sz="2400" dirty="0">
-              <a:solidFill>
-                <a:schemeClr val="accent6">
-                  <a:lumMod val="60000"/>
-                  <a:lumOff val="40000"/>
-                </a:schemeClr>
-              </a:solidFill>
-            </a:endParaRPr>
-          </a:p>
-          <a:p>
-            <a:r>
-              <a:rPr lang="en-US" sz="2400" dirty="0">
-                <a:solidFill>
-                  <a:schemeClr val="accent6">
-                    <a:lumMod val="60000"/>
-                    <a:lumOff val="40000"/>
-                  </a:schemeClr>
-                </a:solidFill>
-              </a:rPr>
-              <a:t>Output may be generic or basic.</a:t>
-            </a:r>
-          </a:p>
-          <a:p>
-            <a:br>
-              <a:rPr lang="en-US" sz="2400" dirty="0">
-                <a:solidFill>
-                  <a:schemeClr val="accent6">
-                    <a:lumMod val="60000"/>
-                    <a:lumOff val="40000"/>
-                  </a:schemeClr>
-                </a:solidFill>
-              </a:rPr>
-            </a:br>
-            <a:endParaRPr lang="en-US" sz="2400" dirty="0">
-              <a:solidFill>
-                <a:schemeClr val="accent6">
-                  <a:lumMod val="60000"/>
-                  <a:lumOff val="40000"/>
-                </a:schemeClr>
-              </a:solidFill>
-            </a:endParaRPr>
-          </a:p>
-          <a:p>
-            <a:r>
-              <a:rPr lang="en-US" sz="2400" b="1" dirty="0">
-                <a:solidFill>
-                  <a:schemeClr val="accent6">
-                    <a:lumMod val="60000"/>
-                    <a:lumOff val="40000"/>
-                  </a:schemeClr>
-                </a:solidFill>
-              </a:rPr>
-              <a:t>Example With Role Prompting</a:t>
-            </a:r>
-            <a:endParaRPr lang="en-US" sz="2400" dirty="0">
-              <a:solidFill>
-                <a:schemeClr val="accent6">
-                  <a:lumMod val="60000"/>
-                  <a:lumOff val="40000"/>
-                </a:schemeClr>
-              </a:solidFill>
-            </a:endParaRPr>
-          </a:p>
-          <a:p>
-            <a:endParaRPr lang="en-US" sz="2400" dirty="0">
-              <a:solidFill>
-                <a:schemeClr val="accent6">
-                  <a:lumMod val="60000"/>
-                  <a:lumOff val="40000"/>
-                </a:schemeClr>
-              </a:solidFill>
-            </a:endParaRPr>
-          </a:p>
-          <a:p>
-            <a:r>
-              <a:rPr lang="en-US" sz="2400" dirty="0">
-                <a:solidFill>
-                  <a:schemeClr val="accent6">
-                    <a:lumMod val="60000"/>
-                    <a:lumOff val="40000"/>
-                  </a:schemeClr>
-                </a:solidFill>
-              </a:rPr>
-              <a:t>Prompt:</a:t>
-            </a:r>
-          </a:p>
-          <a:p>
-            <a:r>
-              <a:rPr lang="en-US" sz="2400" dirty="0">
-                <a:solidFill>
-                  <a:schemeClr val="accent4">
-                    <a:lumMod val="60000"/>
-                    <a:lumOff val="40000"/>
-                  </a:schemeClr>
-                </a:solidFill>
-              </a:rPr>
-              <a:t>Act as a Cybersecurity Expert. Explain API security risks and best practices.</a:t>
-            </a:r>
-          </a:p>
-          <a:p>
-            <a:endParaRPr lang="en-US" sz="2400" dirty="0">
-              <a:solidFill>
-                <a:schemeClr val="accent6">
-                  <a:lumMod val="60000"/>
-                  <a:lumOff val="40000"/>
-                </a:schemeClr>
-              </a:solidFill>
-            </a:endParaRPr>
-          </a:p>
-          <a:p>
-            <a:r>
-              <a:rPr lang="en-US" sz="2400" dirty="0">
-                <a:solidFill>
-                  <a:schemeClr val="accent6">
-                    <a:lumMod val="60000"/>
-                    <a:lumOff val="40000"/>
-                  </a:schemeClr>
-                </a:solidFill>
-              </a:rPr>
-              <a:t>Output will be more professional and detailed.</a:t>
-            </a:r>
-          </a:p>
-        </p:txBody>
-      </p:sp>
+      </p:pic>
+      <p:pic>
+        <p:nvPicPr>
+          <p:cNvPr id="7" name="Picture 6">
+            <a:extLst>
+              <a:ext uri="{FF2B5EF4-FFF2-40B4-BE49-F238E27FC236}">
+                <a16:creationId xmlns:a16="http://schemas.microsoft.com/office/drawing/2014/main" id="{9C7BD846-B36C-D830-67F6-6579E8034A6E}"/>
+              </a:ext>
+            </a:extLst>
+          </p:cNvPr>
+          <p:cNvPicPr>
+            <a:picLocks noChangeAspect="1"/>
+          </p:cNvPicPr>
+          <p:nvPr/>
+        </p:nvPicPr>
+        <p:blipFill>
+          <a:blip r:embed="rId3"/>
+          <a:stretch>
+            <a:fillRect/>
+          </a:stretch>
+        </p:blipFill>
+        <p:spPr>
+          <a:xfrm>
+            <a:off x="0" y="2018625"/>
+            <a:ext cx="4810796" cy="4839375"/>
+          </a:xfrm>
+          <a:prstGeom prst="rect">
+            <a:avLst/>
+          </a:prstGeom>
+        </p:spPr>
+      </p:pic>
+      <p:pic>
+        <p:nvPicPr>
+          <p:cNvPr id="9" name="Picture 8">
+            <a:extLst>
+              <a:ext uri="{FF2B5EF4-FFF2-40B4-BE49-F238E27FC236}">
+                <a16:creationId xmlns:a16="http://schemas.microsoft.com/office/drawing/2014/main" id="{C8534774-BC14-C9B9-B910-8F1028D41DEE}"/>
+              </a:ext>
+            </a:extLst>
+          </p:cNvPr>
+          <p:cNvPicPr>
+            <a:picLocks noChangeAspect="1"/>
+          </p:cNvPicPr>
+          <p:nvPr/>
+        </p:nvPicPr>
+        <p:blipFill>
+          <a:blip r:embed="rId4"/>
+          <a:stretch>
+            <a:fillRect/>
+          </a:stretch>
+        </p:blipFill>
+        <p:spPr>
+          <a:xfrm>
+            <a:off x="5000280" y="213784"/>
+            <a:ext cx="7259063" cy="4486901"/>
+          </a:xfrm>
+          <a:prstGeom prst="rect">
+            <a:avLst/>
+          </a:prstGeom>
+        </p:spPr>
+      </p:pic>
     </p:spTree>
     <p:extLst>
       <p:ext uri="{BB962C8B-B14F-4D97-AF65-F5344CB8AC3E}">
-        <p14:creationId xmlns:p14="http://schemas.microsoft.com/office/powerpoint/2010/main" val="2343117006"/>
+        <p14:creationId xmlns:p14="http://schemas.microsoft.com/office/powerpoint/2010/main" val="2994621357"/>
       </p:ext>
     </p:extLst>
   </p:cSld>
@@ -5640,7 +5685,7 @@
         <p:cNvPr id="1" name="">
           <a:extLst>
             <a:ext uri="{FF2B5EF4-FFF2-40B4-BE49-F238E27FC236}">
-              <a16:creationId xmlns:a16="http://schemas.microsoft.com/office/drawing/2014/main" id="{03308B20-43FC-E4DC-A0ED-2F8D986AC962}"/>
+              <a16:creationId xmlns:a16="http://schemas.microsoft.com/office/drawing/2014/main" id="{36238A8F-DB85-F46E-ECB4-2299235E86E0}"/>
             </a:ext>
           </a:extLst>
         </p:cNvPr>
@@ -5655,190 +5700,70 @@
           <a:chExt cx="0" cy="0"/>
         </a:xfrm>
       </p:grpSpPr>
-      <p:sp>
-        <p:nvSpPr>
-          <p:cNvPr id="4" name="TextBox 3">
-            <a:extLst>
-              <a:ext uri="{FF2B5EF4-FFF2-40B4-BE49-F238E27FC236}">
-                <a16:creationId xmlns:a16="http://schemas.microsoft.com/office/drawing/2014/main" id="{0BCBBB84-87FB-0D88-6817-2E89677B46BE}"/>
-              </a:ext>
-            </a:extLst>
-          </p:cNvPr>
-          <p:cNvSpPr txBox="1"/>
+      <p:pic>
+        <p:nvPicPr>
+          <p:cNvPr id="11" name="Picture 10">
+            <a:extLst>
+              <a:ext uri="{FF2B5EF4-FFF2-40B4-BE49-F238E27FC236}">
+                <a16:creationId xmlns:a16="http://schemas.microsoft.com/office/drawing/2014/main" id="{2BC31BF0-9161-27D6-4D8F-26678A085E59}"/>
+              </a:ext>
+            </a:extLst>
+          </p:cNvPr>
+          <p:cNvPicPr>
+            <a:picLocks noChangeAspect="1"/>
+          </p:cNvPicPr>
           <p:nvPr/>
-        </p:nvSpPr>
+        </p:nvPicPr>
+        <p:blipFill>
+          <a:blip r:embed="rId2"/>
+          <a:stretch>
+            <a:fillRect/>
+          </a:stretch>
+        </p:blipFill>
         <p:spPr>
           <a:xfrm>
-            <a:off x="182880" y="312874"/>
-            <a:ext cx="11713464" cy="3416320"/>
+            <a:off x="152686" y="0"/>
+            <a:ext cx="6820852" cy="4648849"/>
           </a:xfrm>
           <a:prstGeom prst="rect">
             <a:avLst/>
           </a:prstGeom>
-          <a:noFill/>
         </p:spPr>
-        <p:txBody>
-          <a:bodyPr wrap="square">
-            <a:spAutoFit/>
-          </a:bodyPr>
-          <a:lstStyle/>
-          <a:p>
-            <a:r>
-              <a:rPr lang="en-US" sz="2400" b="1" dirty="0">
-                <a:solidFill>
-                  <a:schemeClr val="accent6">
-                    <a:lumMod val="60000"/>
-                    <a:lumOff val="40000"/>
-                  </a:schemeClr>
-                </a:solidFill>
-              </a:rPr>
-              <a:t>Common Roles Used in Prompt Engineering</a:t>
-            </a:r>
-            <a:endParaRPr lang="en-US" sz="2400" dirty="0">
-              <a:solidFill>
-                <a:schemeClr val="accent6">
-                  <a:lumMod val="60000"/>
-                  <a:lumOff val="40000"/>
-                </a:schemeClr>
-              </a:solidFill>
-            </a:endParaRPr>
-          </a:p>
-          <a:p>
-            <a:pPr lvl="0"/>
-            <a:endParaRPr lang="en-US" sz="2400" dirty="0">
-              <a:solidFill>
-                <a:schemeClr val="accent6">
-                  <a:lumMod val="60000"/>
-                  <a:lumOff val="40000"/>
-                </a:schemeClr>
-              </a:solidFill>
-            </a:endParaRPr>
-          </a:p>
-          <a:p>
-            <a:pPr marL="342900" lvl="0" indent="-342900">
-              <a:buFont typeface="Arial" panose="020B0604020202020204" pitchFamily="34" charset="0"/>
-              <a:buChar char="•"/>
-            </a:pPr>
-            <a:r>
-              <a:rPr lang="en-US" sz="2400" dirty="0">
-                <a:solidFill>
-                  <a:schemeClr val="accent6">
-                    <a:lumMod val="60000"/>
-                    <a:lumOff val="40000"/>
-                  </a:schemeClr>
-                </a:solidFill>
-              </a:rPr>
-              <a:t>Senior Software Developer</a:t>
-            </a:r>
-          </a:p>
-          <a:p>
-            <a:pPr marL="342900" lvl="0" indent="-342900">
-              <a:buFont typeface="Arial" panose="020B0604020202020204" pitchFamily="34" charset="0"/>
-              <a:buChar char="•"/>
-            </a:pPr>
-            <a:r>
-              <a:rPr lang="en-US" sz="2400" dirty="0">
-                <a:solidFill>
-                  <a:schemeClr val="accent6">
-                    <a:lumMod val="60000"/>
-                    <a:lumOff val="40000"/>
-                  </a:schemeClr>
-                </a:solidFill>
-              </a:rPr>
-              <a:t>Data Scientist</a:t>
-            </a:r>
-          </a:p>
-          <a:p>
-            <a:pPr marL="342900" lvl="0" indent="-342900">
-              <a:buFont typeface="Arial" panose="020B0604020202020204" pitchFamily="34" charset="0"/>
-              <a:buChar char="•"/>
-            </a:pPr>
-            <a:r>
-              <a:rPr lang="en-US" sz="2400" dirty="0">
-                <a:solidFill>
-                  <a:schemeClr val="accent6">
-                    <a:lumMod val="60000"/>
-                    <a:lumOff val="40000"/>
-                  </a:schemeClr>
-                </a:solidFill>
-              </a:rPr>
-              <a:t>Medical Professional</a:t>
-            </a:r>
-          </a:p>
-          <a:p>
-            <a:pPr marL="342900" lvl="0" indent="-342900">
-              <a:buFont typeface="Arial" panose="020B0604020202020204" pitchFamily="34" charset="0"/>
-              <a:buChar char="•"/>
-            </a:pPr>
-            <a:r>
-              <a:rPr lang="en-US" sz="2400" dirty="0">
-                <a:solidFill>
-                  <a:schemeClr val="accent6">
-                    <a:lumMod val="60000"/>
-                    <a:lumOff val="40000"/>
-                  </a:schemeClr>
-                </a:solidFill>
-              </a:rPr>
-              <a:t>Financial Advisor</a:t>
-            </a:r>
-          </a:p>
-          <a:p>
-            <a:pPr marL="342900" lvl="0" indent="-342900">
-              <a:buFont typeface="Arial" panose="020B0604020202020204" pitchFamily="34" charset="0"/>
-              <a:buChar char="•"/>
-            </a:pPr>
-            <a:r>
-              <a:rPr lang="en-US" sz="2400" dirty="0">
-                <a:solidFill>
-                  <a:schemeClr val="accent6">
-                    <a:lumMod val="60000"/>
-                    <a:lumOff val="40000"/>
-                  </a:schemeClr>
-                </a:solidFill>
-              </a:rPr>
-              <a:t>Teacher or Trainer</a:t>
-            </a:r>
-          </a:p>
-          <a:p>
-            <a:pPr marL="342900" lvl="0" indent="-342900">
-              <a:buFont typeface="Arial" panose="020B0604020202020204" pitchFamily="34" charset="0"/>
-              <a:buChar char="•"/>
-            </a:pPr>
-            <a:r>
-              <a:rPr lang="en-US" sz="2400" dirty="0">
-                <a:solidFill>
-                  <a:schemeClr val="accent6">
-                    <a:lumMod val="60000"/>
-                    <a:lumOff val="40000"/>
-                  </a:schemeClr>
-                </a:solidFill>
-              </a:rPr>
-              <a:t>Business Consultant</a:t>
-            </a:r>
-          </a:p>
-          <a:p>
-            <a:pPr marL="342900" lvl="0" indent="-342900">
-              <a:buFont typeface="Arial" panose="020B0604020202020204" pitchFamily="34" charset="0"/>
-              <a:buChar char="•"/>
-            </a:pPr>
-            <a:r>
-              <a:rPr lang="en-US" sz="2400" dirty="0">
-                <a:solidFill>
-                  <a:schemeClr val="accent6">
-                    <a:lumMod val="60000"/>
-                    <a:lumOff val="40000"/>
-                  </a:schemeClr>
-                </a:solidFill>
-              </a:rPr>
-              <a:t>Research Analyst</a:t>
-            </a:r>
-          </a:p>
-        </p:txBody>
-      </p:sp>
+      </p:pic>
+      <p:pic>
+        <p:nvPicPr>
+          <p:cNvPr id="3" name="Picture 2">
+            <a:extLst>
+              <a:ext uri="{FF2B5EF4-FFF2-40B4-BE49-F238E27FC236}">
+                <a16:creationId xmlns:a16="http://schemas.microsoft.com/office/drawing/2014/main" id="{BBC9E14F-F130-AAD9-7464-C629376EB023}"/>
+              </a:ext>
+            </a:extLst>
+          </p:cNvPr>
+          <p:cNvPicPr>
+            <a:picLocks noChangeAspect="1"/>
+          </p:cNvPicPr>
+          <p:nvPr/>
+        </p:nvPicPr>
+        <p:blipFill>
+          <a:blip r:embed="rId3"/>
+          <a:stretch>
+            <a:fillRect/>
+          </a:stretch>
+        </p:blipFill>
+        <p:spPr>
+          <a:xfrm>
+            <a:off x="6699710" y="1094045"/>
+            <a:ext cx="5229955" cy="5401429"/>
+          </a:xfrm>
+          <a:prstGeom prst="rect">
+            <a:avLst/>
+          </a:prstGeom>
+        </p:spPr>
+      </p:pic>
     </p:spTree>
     <p:extLst>
       <p:ext uri="{BB962C8B-B14F-4D97-AF65-F5344CB8AC3E}">
-        <p14:creationId xmlns:p14="http://schemas.microsoft.com/office/powerpoint/2010/main" val="1771811018"/>
+        <p14:creationId xmlns:p14="http://schemas.microsoft.com/office/powerpoint/2010/main" val="1478099669"/>
       </p:ext>
     </p:extLst>
   </p:cSld>
@@ -6053,6 +5978,484 @@
         <p:cNvPr id="1" name="">
           <a:extLst>
             <a:ext uri="{FF2B5EF4-FFF2-40B4-BE49-F238E27FC236}">
+              <a16:creationId xmlns:a16="http://schemas.microsoft.com/office/drawing/2014/main" id="{E4ACE555-C010-2543-DFFC-F5D5D5BD2747}"/>
+            </a:ext>
+          </a:extLst>
+        </p:cNvPr>
+        <p:cNvGrpSpPr/>
+        <p:nvPr/>
+      </p:nvGrpSpPr>
+      <p:grpSpPr>
+        <a:xfrm>
+          <a:off x="0" y="0"/>
+          <a:ext cx="0" cy="0"/>
+          <a:chOff x="0" y="0"/>
+          <a:chExt cx="0" cy="0"/>
+        </a:xfrm>
+      </p:grpSpPr>
+      <p:sp>
+        <p:nvSpPr>
+          <p:cNvPr id="4" name="TextBox 3">
+            <a:extLst>
+              <a:ext uri="{FF2B5EF4-FFF2-40B4-BE49-F238E27FC236}">
+                <a16:creationId xmlns:a16="http://schemas.microsoft.com/office/drawing/2014/main" id="{B2C5F2D7-4594-AE38-A9A4-72FEA6A3F207}"/>
+              </a:ext>
+            </a:extLst>
+          </p:cNvPr>
+          <p:cNvSpPr txBox="1"/>
+          <p:nvPr/>
+        </p:nvSpPr>
+        <p:spPr>
+          <a:xfrm>
+            <a:off x="182880" y="312874"/>
+            <a:ext cx="11713464" cy="461665"/>
+          </a:xfrm>
+          <a:prstGeom prst="rect">
+            <a:avLst/>
+          </a:prstGeom>
+          <a:noFill/>
+        </p:spPr>
+        <p:txBody>
+          <a:bodyPr wrap="square">
+            <a:spAutoFit/>
+          </a:bodyPr>
+          <a:lstStyle/>
+          <a:p>
+            <a:r>
+              <a:rPr lang="en-US" sz="2400" b="1" dirty="0">
+                <a:solidFill>
+                  <a:schemeClr val="accent6">
+                    <a:lumMod val="60000"/>
+                    <a:lumOff val="40000"/>
+                  </a:schemeClr>
+                </a:solidFill>
+              </a:rPr>
+              <a:t>Example Without Role Prompting</a:t>
+            </a:r>
+            <a:endParaRPr lang="en-US" sz="2400" dirty="0">
+              <a:solidFill>
+                <a:schemeClr val="accent6">
+                  <a:lumMod val="60000"/>
+                  <a:lumOff val="40000"/>
+                </a:schemeClr>
+              </a:solidFill>
+            </a:endParaRPr>
+          </a:p>
+        </p:txBody>
+      </p:sp>
+      <p:sp>
+        <p:nvSpPr>
+          <p:cNvPr id="3" name="TextBox 2">
+            <a:extLst>
+              <a:ext uri="{FF2B5EF4-FFF2-40B4-BE49-F238E27FC236}">
+                <a16:creationId xmlns:a16="http://schemas.microsoft.com/office/drawing/2014/main" id="{C724B8A1-C3E8-C753-CBE0-AE3A30B1CDF2}"/>
+              </a:ext>
+            </a:extLst>
+          </p:cNvPr>
+          <p:cNvSpPr txBox="1"/>
+          <p:nvPr/>
+        </p:nvSpPr>
+        <p:spPr>
+          <a:xfrm>
+            <a:off x="5705856" y="1607326"/>
+            <a:ext cx="6190488" cy="2308324"/>
+          </a:xfrm>
+          <a:prstGeom prst="rect">
+            <a:avLst/>
+          </a:prstGeom>
+          <a:noFill/>
+        </p:spPr>
+        <p:txBody>
+          <a:bodyPr wrap="square">
+            <a:spAutoFit/>
+          </a:bodyPr>
+          <a:lstStyle/>
+          <a:p>
+            <a:r>
+              <a:rPr lang="en-US" sz="2400" dirty="0">
+                <a:solidFill>
+                  <a:schemeClr val="accent6">
+                    <a:lumMod val="60000"/>
+                    <a:lumOff val="40000"/>
+                  </a:schemeClr>
+                </a:solidFill>
+              </a:rPr>
+              <a:t>Prompt (with role prompting):</a:t>
+            </a:r>
+          </a:p>
+          <a:p>
+            <a:endParaRPr lang="en-US" sz="2400" dirty="0">
+              <a:solidFill>
+                <a:schemeClr val="accent6">
+                  <a:lumMod val="60000"/>
+                  <a:lumOff val="40000"/>
+                </a:schemeClr>
+              </a:solidFill>
+            </a:endParaRPr>
+          </a:p>
+          <a:p>
+            <a:r>
+              <a:rPr lang="en-US" sz="2400" dirty="0">
+                <a:solidFill>
+                  <a:schemeClr val="accent4">
+                    <a:lumMod val="60000"/>
+                    <a:lumOff val="40000"/>
+                  </a:schemeClr>
+                </a:solidFill>
+              </a:rPr>
+              <a:t>Act as a Cybersecurity Expert. Explain API security risks and best practices.</a:t>
+            </a:r>
+          </a:p>
+          <a:p>
+            <a:endParaRPr lang="en-US" sz="2400" dirty="0">
+              <a:solidFill>
+                <a:schemeClr val="accent6">
+                  <a:lumMod val="60000"/>
+                  <a:lumOff val="40000"/>
+                </a:schemeClr>
+              </a:solidFill>
+            </a:endParaRPr>
+          </a:p>
+          <a:p>
+            <a:r>
+              <a:rPr lang="en-US" sz="2400" dirty="0">
+                <a:solidFill>
+                  <a:schemeClr val="accent6">
+                    <a:lumMod val="60000"/>
+                    <a:lumOff val="40000"/>
+                  </a:schemeClr>
+                </a:solidFill>
+              </a:rPr>
+              <a:t>Output will be more professional and detailed.</a:t>
+            </a:r>
+          </a:p>
+        </p:txBody>
+      </p:sp>
+      <p:sp>
+        <p:nvSpPr>
+          <p:cNvPr id="6" name="TextBox 5">
+            <a:extLst>
+              <a:ext uri="{FF2B5EF4-FFF2-40B4-BE49-F238E27FC236}">
+                <a16:creationId xmlns:a16="http://schemas.microsoft.com/office/drawing/2014/main" id="{9278A184-7E84-E67B-52CA-5793956214C5}"/>
+              </a:ext>
+            </a:extLst>
+          </p:cNvPr>
+          <p:cNvSpPr txBox="1"/>
+          <p:nvPr/>
+        </p:nvSpPr>
+        <p:spPr>
+          <a:xfrm>
+            <a:off x="295656" y="1607326"/>
+            <a:ext cx="4402836" cy="1938992"/>
+          </a:xfrm>
+          <a:prstGeom prst="rect">
+            <a:avLst/>
+          </a:prstGeom>
+          <a:noFill/>
+        </p:spPr>
+        <p:txBody>
+          <a:bodyPr wrap="square">
+            <a:spAutoFit/>
+          </a:bodyPr>
+          <a:lstStyle/>
+          <a:p>
+            <a:r>
+              <a:rPr lang="en-US" sz="2400" dirty="0">
+                <a:solidFill>
+                  <a:schemeClr val="accent6">
+                    <a:lumMod val="60000"/>
+                    <a:lumOff val="40000"/>
+                  </a:schemeClr>
+                </a:solidFill>
+              </a:rPr>
+              <a:t>Prompt (no role prompting):</a:t>
+            </a:r>
+          </a:p>
+          <a:p>
+            <a:endParaRPr lang="en-US" sz="2400" dirty="0">
+              <a:solidFill>
+                <a:schemeClr val="accent6">
+                  <a:lumMod val="60000"/>
+                  <a:lumOff val="40000"/>
+                </a:schemeClr>
+              </a:solidFill>
+            </a:endParaRPr>
+          </a:p>
+          <a:p>
+            <a:r>
+              <a:rPr lang="en-US" sz="2400" dirty="0">
+                <a:solidFill>
+                  <a:schemeClr val="accent4">
+                    <a:lumMod val="60000"/>
+                    <a:lumOff val="40000"/>
+                  </a:schemeClr>
+                </a:solidFill>
+              </a:rPr>
+              <a:t>Explain API security.</a:t>
+            </a:r>
+          </a:p>
+          <a:p>
+            <a:endParaRPr lang="en-US" sz="2400" dirty="0">
+              <a:solidFill>
+                <a:schemeClr val="accent6">
+                  <a:lumMod val="60000"/>
+                  <a:lumOff val="40000"/>
+                </a:schemeClr>
+              </a:solidFill>
+            </a:endParaRPr>
+          </a:p>
+          <a:p>
+            <a:r>
+              <a:rPr lang="en-US" sz="2400" dirty="0">
+                <a:solidFill>
+                  <a:schemeClr val="accent6">
+                    <a:lumMod val="60000"/>
+                    <a:lumOff val="40000"/>
+                  </a:schemeClr>
+                </a:solidFill>
+              </a:rPr>
+              <a:t>Output may be generic or basic.</a:t>
+            </a:r>
+          </a:p>
+        </p:txBody>
+      </p:sp>
+    </p:spTree>
+    <p:extLst>
+      <p:ext uri="{BB962C8B-B14F-4D97-AF65-F5344CB8AC3E}">
+        <p14:creationId xmlns:p14="http://schemas.microsoft.com/office/powerpoint/2010/main" val="2343117006"/>
+      </p:ext>
+    </p:extLst>
+  </p:cSld>
+  <p:clrMapOvr>
+    <a:masterClrMapping/>
+  </p:clrMapOvr>
+</p:sld>
+</file>
+
+<file path=ppt/slides/slide21.xml><?xml version="1.0" encoding="utf-8"?>
+<p:sld xmlns:a="http://schemas.openxmlformats.org/drawingml/2006/main" xmlns:r="http://schemas.openxmlformats.org/officeDocument/2006/relationships" xmlns:p="http://schemas.openxmlformats.org/presentationml/2006/main">
+  <p:cSld>
+    <p:spTree>
+      <p:nvGrpSpPr>
+        <p:cNvPr id="1" name="">
+          <a:extLst>
+            <a:ext uri="{FF2B5EF4-FFF2-40B4-BE49-F238E27FC236}">
+              <a16:creationId xmlns:a16="http://schemas.microsoft.com/office/drawing/2014/main" id="{03308B20-43FC-E4DC-A0ED-2F8D986AC962}"/>
+            </a:ext>
+          </a:extLst>
+        </p:cNvPr>
+        <p:cNvGrpSpPr/>
+        <p:nvPr/>
+      </p:nvGrpSpPr>
+      <p:grpSpPr>
+        <a:xfrm>
+          <a:off x="0" y="0"/>
+          <a:ext cx="0" cy="0"/>
+          <a:chOff x="0" y="0"/>
+          <a:chExt cx="0" cy="0"/>
+        </a:xfrm>
+      </p:grpSpPr>
+      <p:sp>
+        <p:nvSpPr>
+          <p:cNvPr id="4" name="TextBox 3">
+            <a:extLst>
+              <a:ext uri="{FF2B5EF4-FFF2-40B4-BE49-F238E27FC236}">
+                <a16:creationId xmlns:a16="http://schemas.microsoft.com/office/drawing/2014/main" id="{0BCBBB84-87FB-0D88-6817-2E89677B46BE}"/>
+              </a:ext>
+            </a:extLst>
+          </p:cNvPr>
+          <p:cNvSpPr txBox="1"/>
+          <p:nvPr/>
+        </p:nvSpPr>
+        <p:spPr>
+          <a:xfrm>
+            <a:off x="182880" y="312874"/>
+            <a:ext cx="6227064" cy="3416320"/>
+          </a:xfrm>
+          <a:prstGeom prst="rect">
+            <a:avLst/>
+          </a:prstGeom>
+          <a:noFill/>
+        </p:spPr>
+        <p:txBody>
+          <a:bodyPr wrap="square">
+            <a:spAutoFit/>
+          </a:bodyPr>
+          <a:lstStyle/>
+          <a:p>
+            <a:r>
+              <a:rPr lang="en-US" sz="2400" b="1" dirty="0">
+                <a:solidFill>
+                  <a:schemeClr val="accent6">
+                    <a:lumMod val="60000"/>
+                    <a:lumOff val="40000"/>
+                  </a:schemeClr>
+                </a:solidFill>
+              </a:rPr>
+              <a:t>Common Roles Used in Prompt Engineering</a:t>
+            </a:r>
+            <a:endParaRPr lang="en-US" sz="2400" dirty="0">
+              <a:solidFill>
+                <a:schemeClr val="accent6">
+                  <a:lumMod val="60000"/>
+                  <a:lumOff val="40000"/>
+                </a:schemeClr>
+              </a:solidFill>
+            </a:endParaRPr>
+          </a:p>
+          <a:p>
+            <a:pPr lvl="0"/>
+            <a:endParaRPr lang="en-US" sz="2400" dirty="0">
+              <a:solidFill>
+                <a:schemeClr val="accent6">
+                  <a:lumMod val="60000"/>
+                  <a:lumOff val="40000"/>
+                </a:schemeClr>
+              </a:solidFill>
+            </a:endParaRPr>
+          </a:p>
+          <a:p>
+            <a:pPr marL="342900" lvl="0" indent="-342900">
+              <a:buFont typeface="Arial" panose="020B0604020202020204" pitchFamily="34" charset="0"/>
+              <a:buChar char="•"/>
+            </a:pPr>
+            <a:r>
+              <a:rPr lang="en-US" sz="2400" dirty="0">
+                <a:solidFill>
+                  <a:schemeClr val="accent6">
+                    <a:lumMod val="60000"/>
+                    <a:lumOff val="40000"/>
+                  </a:schemeClr>
+                </a:solidFill>
+              </a:rPr>
+              <a:t>Senior Software Developer</a:t>
+            </a:r>
+          </a:p>
+          <a:p>
+            <a:pPr marL="342900" lvl="0" indent="-342900">
+              <a:buFont typeface="Arial" panose="020B0604020202020204" pitchFamily="34" charset="0"/>
+              <a:buChar char="•"/>
+            </a:pPr>
+            <a:r>
+              <a:rPr lang="en-US" sz="2400" dirty="0">
+                <a:solidFill>
+                  <a:schemeClr val="accent6">
+                    <a:lumMod val="60000"/>
+                    <a:lumOff val="40000"/>
+                  </a:schemeClr>
+                </a:solidFill>
+              </a:rPr>
+              <a:t>Data Scientist</a:t>
+            </a:r>
+          </a:p>
+          <a:p>
+            <a:pPr marL="342900" lvl="0" indent="-342900">
+              <a:buFont typeface="Arial" panose="020B0604020202020204" pitchFamily="34" charset="0"/>
+              <a:buChar char="•"/>
+            </a:pPr>
+            <a:r>
+              <a:rPr lang="en-US" sz="2400" dirty="0">
+                <a:solidFill>
+                  <a:schemeClr val="accent6">
+                    <a:lumMod val="60000"/>
+                    <a:lumOff val="40000"/>
+                  </a:schemeClr>
+                </a:solidFill>
+              </a:rPr>
+              <a:t>Medical Professional</a:t>
+            </a:r>
+          </a:p>
+          <a:p>
+            <a:pPr marL="342900" lvl="0" indent="-342900">
+              <a:buFont typeface="Arial" panose="020B0604020202020204" pitchFamily="34" charset="0"/>
+              <a:buChar char="•"/>
+            </a:pPr>
+            <a:r>
+              <a:rPr lang="en-US" sz="2400" dirty="0">
+                <a:solidFill>
+                  <a:schemeClr val="accent6">
+                    <a:lumMod val="60000"/>
+                    <a:lumOff val="40000"/>
+                  </a:schemeClr>
+                </a:solidFill>
+              </a:rPr>
+              <a:t>Financial Advisor</a:t>
+            </a:r>
+          </a:p>
+          <a:p>
+            <a:pPr marL="342900" lvl="0" indent="-342900">
+              <a:buFont typeface="Arial" panose="020B0604020202020204" pitchFamily="34" charset="0"/>
+              <a:buChar char="•"/>
+            </a:pPr>
+            <a:r>
+              <a:rPr lang="en-US" sz="2400" dirty="0">
+                <a:solidFill>
+                  <a:schemeClr val="accent6">
+                    <a:lumMod val="60000"/>
+                    <a:lumOff val="40000"/>
+                  </a:schemeClr>
+                </a:solidFill>
+              </a:rPr>
+              <a:t>Teacher or Trainer</a:t>
+            </a:r>
+          </a:p>
+          <a:p>
+            <a:pPr marL="342900" lvl="0" indent="-342900">
+              <a:buFont typeface="Arial" panose="020B0604020202020204" pitchFamily="34" charset="0"/>
+              <a:buChar char="•"/>
+            </a:pPr>
+            <a:r>
+              <a:rPr lang="en-US" sz="2400" dirty="0">
+                <a:solidFill>
+                  <a:schemeClr val="accent6">
+                    <a:lumMod val="60000"/>
+                    <a:lumOff val="40000"/>
+                  </a:schemeClr>
+                </a:solidFill>
+              </a:rPr>
+              <a:t>Business Consultant</a:t>
+            </a:r>
+          </a:p>
+          <a:p>
+            <a:pPr marL="342900" lvl="0" indent="-342900">
+              <a:buFont typeface="Arial" panose="020B0604020202020204" pitchFamily="34" charset="0"/>
+              <a:buChar char="•"/>
+            </a:pPr>
+            <a:r>
+              <a:rPr lang="en-US" sz="2400" dirty="0">
+                <a:solidFill>
+                  <a:schemeClr val="accent6">
+                    <a:lumMod val="60000"/>
+                    <a:lumOff val="40000"/>
+                  </a:schemeClr>
+                </a:solidFill>
+              </a:rPr>
+              <a:t>Research Analyst</a:t>
+            </a:r>
+          </a:p>
+        </p:txBody>
+      </p:sp>
+    </p:spTree>
+    <p:extLst>
+      <p:ext uri="{BB962C8B-B14F-4D97-AF65-F5344CB8AC3E}">
+        <p14:creationId xmlns:p14="http://schemas.microsoft.com/office/powerpoint/2010/main" val="1771811018"/>
+      </p:ext>
+    </p:extLst>
+  </p:cSld>
+  <p:clrMapOvr>
+    <a:masterClrMapping/>
+  </p:clrMapOvr>
+</p:sld>
+</file>
+
+<file path=ppt/slides/slide22.xml><?xml version="1.0" encoding="utf-8"?>
+<p:sld xmlns:a="http://schemas.openxmlformats.org/drawingml/2006/main" xmlns:r="http://schemas.openxmlformats.org/officeDocument/2006/relationships" xmlns:p="http://schemas.openxmlformats.org/presentationml/2006/main">
+  <p:cSld>
+    <p:spTree>
+      <p:nvGrpSpPr>
+        <p:cNvPr id="1" name="">
+          <a:extLst>
+            <a:ext uri="{FF2B5EF4-FFF2-40B4-BE49-F238E27FC236}">
               <a16:creationId xmlns:a16="http://schemas.microsoft.com/office/drawing/2014/main" id="{A4576AD8-5CB7-BC88-7211-D0A370258F5D}"/>
             </a:ext>
           </a:extLst>
@@ -6083,7 +6486,7 @@
         <p:spPr>
           <a:xfrm>
             <a:off x="182880" y="221434"/>
-            <a:ext cx="11713464" cy="2308324"/>
+            <a:ext cx="11713464" cy="3046988"/>
           </a:xfrm>
           <a:prstGeom prst="rect">
             <a:avLst/>
@@ -6107,6 +6510,18 @@
               </a:rPr>
               <a:t>Combining All Three Techniques: </a:t>
             </a:r>
+          </a:p>
+          <a:p>
+            <a:endParaRPr lang="en-US" sz="2400" b="1" dirty="0">
+              <a:solidFill>
+                <a:schemeClr val="accent6">
+                  <a:lumMod val="60000"/>
+                  <a:lumOff val="40000"/>
+                </a:schemeClr>
+              </a:solidFill>
+            </a:endParaRPr>
+          </a:p>
+          <a:p>
             <a:r>
               <a:rPr lang="en-US" sz="2400" dirty="0">
                 <a:solidFill>
@@ -6207,7 +6622,7 @@
 </p:sld>
 </file>
 
-<file path=ppt/slides/slide21.xml><?xml version="1.0" encoding="utf-8"?>
+<file path=ppt/slides/slide23.xml><?xml version="1.0" encoding="utf-8"?>
 <p:sld xmlns:a="http://schemas.openxmlformats.org/drawingml/2006/main" xmlns:r="http://schemas.openxmlformats.org/officeDocument/2006/relationships" xmlns:p="http://schemas.openxmlformats.org/presentationml/2006/main">
   <p:cSld>
     <p:spTree>
@@ -6245,7 +6660,7 @@
         <p:spPr>
           <a:xfrm>
             <a:off x="182880" y="221434"/>
-            <a:ext cx="11713464" cy="6001643"/>
+            <a:ext cx="11548872" cy="6370975"/>
           </a:xfrm>
           <a:prstGeom prst="rect">
             <a:avLst/>
@@ -6335,7 +6750,18 @@
                   </a:schemeClr>
                 </a:solidFill>
               </a:rPr>
-              <a:t> Act as a Senior Tax Accountant with 20 years of experience in retail finance. </a:t>
+              <a:t> </a:t>
+            </a:r>
+            <a:r>
+              <a:rPr lang="en-US" sz="2400" dirty="0">
+                <a:solidFill>
+                  <a:schemeClr val="accent4">
+                    <a:lumMod val="60000"/>
+                    <a:lumOff val="40000"/>
+                  </a:schemeClr>
+                </a:solidFill>
+              </a:rPr>
+              <a:t>Act as a Senior Tax Accountant with 20 years of experience in retail finance. </a:t>
             </a:r>
           </a:p>
           <a:p>
@@ -6363,7 +6789,7 @@
             <a:r>
               <a:rPr lang="en-US" sz="2400" b="1" dirty="0">
                 <a:solidFill>
-                  <a:schemeClr val="accent6">
+                  <a:schemeClr val="accent4">
                     <a:lumMod val="60000"/>
                     <a:lumOff val="40000"/>
                   </a:schemeClr>
@@ -6374,7 +6800,7 @@
             <a:r>
               <a:rPr lang="en-US" sz="2400" dirty="0">
                 <a:solidFill>
-                  <a:schemeClr val="accent6">
+                  <a:schemeClr val="accent4">
                     <a:lumMod val="60000"/>
                     <a:lumOff val="40000"/>
                   </a:schemeClr>
@@ -6388,7 +6814,7 @@
             <a:r>
               <a:rPr lang="en-US" sz="2400" i="1" dirty="0">
                 <a:solidFill>
-                  <a:schemeClr val="accent6">
+                  <a:schemeClr val="accent4">
                     <a:lumMod val="60000"/>
                     <a:lumOff val="40000"/>
                   </a:schemeClr>
@@ -6399,7 +6825,7 @@
             <a:r>
               <a:rPr lang="en-US" sz="2400" dirty="0">
                 <a:solidFill>
-                  <a:schemeClr val="accent6">
+                  <a:schemeClr val="accent4">
                     <a:lumMod val="60000"/>
                     <a:lumOff val="40000"/>
                   </a:schemeClr>
@@ -6410,7 +6836,7 @@
             <a:r>
               <a:rPr lang="en-US" sz="2400" dirty="0">
                 <a:solidFill>
-                  <a:schemeClr val="accent6">
+                  <a:schemeClr val="accent4">
                     <a:lumMod val="60000"/>
                     <a:lumOff val="40000"/>
                   </a:schemeClr>
@@ -6425,6 +6851,126 @@
               </a:rPr>
               <a:t>1.2.7</a:t>
             </a:r>
+            <a:endParaRPr lang="en-US" sz="2400" dirty="0">
+              <a:solidFill>
+                <a:schemeClr val="accent4">
+                  <a:lumMod val="60000"/>
+                  <a:lumOff val="40000"/>
+                </a:schemeClr>
+              </a:solidFill>
+            </a:endParaRPr>
+          </a:p>
+          <a:p>
+            <a:r>
+              <a:rPr lang="en-US" sz="2400" b="1" dirty="0">
+                <a:solidFill>
+                  <a:schemeClr val="accent4">
+                    <a:lumMod val="60000"/>
+                    <a:lumOff val="40000"/>
+                  </a:schemeClr>
+                </a:solidFill>
+              </a:rPr>
+              <a:t>Scenario B:</a:t>
+            </a:r>
+            <a:r>
+              <a:rPr lang="en-US" sz="2400" dirty="0">
+                <a:solidFill>
+                  <a:schemeClr val="accent4">
+                    <a:lumMod val="60000"/>
+                    <a:lumOff val="40000"/>
+                  </a:schemeClr>
+                </a:solidFill>
+              </a:rPr>
+              <a:t> Buy a $50 book, 20% discount, 10% tax.</a:t>
+            </a:r>
+          </a:p>
+          <a:p>
+            <a:pPr lvl="1"/>
+            <a:r>
+              <a:rPr lang="en-US" sz="2400" i="1" dirty="0">
+                <a:solidFill>
+                  <a:schemeClr val="accent4">
+                    <a:lumMod val="60000"/>
+                    <a:lumOff val="40000"/>
+                  </a:schemeClr>
+                </a:solidFill>
+              </a:rPr>
+              <a:t>Reasoning:</a:t>
+            </a:r>
+            <a:r>
+              <a:rPr lang="en-US" sz="2400" dirty="0">
+                <a:solidFill>
+                  <a:schemeClr val="accent4">
+                    <a:lumMod val="60000"/>
+                    <a:lumOff val="40000"/>
+                  </a:schemeClr>
+                </a:solidFill>
+              </a:rPr>
+              <a:t> Discount is $50 * 0.20 = $10. Subtotal is $40. Tax is $40 * 0.10 = $4. Total is $44. </a:t>
+            </a:r>
+            <a:r>
+              <a:rPr lang="en-US" sz="2400" dirty="0">
+                <a:solidFill>
+                  <a:schemeClr val="accent4">
+                    <a:lumMod val="60000"/>
+                    <a:lumOff val="40000"/>
+                  </a:schemeClr>
+                </a:solidFill>
+                <a:hlinkClick r:id="rId3">
+                  <a:extLst>
+                    <a:ext uri="{A12FA001-AC4F-418D-AE19-62706E023703}">
+                      <ahyp:hlinkClr xmlns:ahyp="http://schemas.microsoft.com/office/drawing/2018/hyperlinkcolor" val="tx"/>
+                    </a:ext>
+                  </a:extLst>
+                </a:hlinkClick>
+              </a:rPr>
+              <a:t>1.1.4</a:t>
+            </a:r>
+            <a:endParaRPr lang="en-US" sz="2400" dirty="0">
+              <a:solidFill>
+                <a:schemeClr val="accent4">
+                  <a:lumMod val="60000"/>
+                  <a:lumOff val="40000"/>
+                </a:schemeClr>
+              </a:solidFill>
+            </a:endParaRPr>
+          </a:p>
+          <a:p>
+            <a:r>
+              <a:rPr lang="en-US" sz="2400" b="1" dirty="0">
+                <a:solidFill>
+                  <a:schemeClr val="accent6">
+                    <a:lumMod val="60000"/>
+                    <a:lumOff val="40000"/>
+                  </a:schemeClr>
+                </a:solidFill>
+              </a:rPr>
+              <a:t>Task:</a:t>
+            </a:r>
+            <a:r>
+              <a:rPr lang="en-US" sz="2400" dirty="0">
+                <a:solidFill>
+                  <a:schemeClr val="accent6">
+                    <a:lumMod val="60000"/>
+                    <a:lumOff val="40000"/>
+                  </a:schemeClr>
+                </a:solidFill>
+              </a:rPr>
+              <a:t> </a:t>
+            </a:r>
+            <a:r>
+              <a:rPr lang="en-US" sz="2400" dirty="0">
+                <a:solidFill>
+                  <a:schemeClr val="accent4">
+                    <a:lumMod val="60000"/>
+                    <a:lumOff val="40000"/>
+                  </a:schemeClr>
+                </a:solidFill>
+              </a:rPr>
+              <a:t>Now, calculate the final total for a customer buying a laptop for $1,200 with a 15% discount and 7% sales tax.</a:t>
+            </a:r>
+          </a:p>
+          <a:p>
             <a:endParaRPr lang="en-US" sz="2400" dirty="0">
               <a:solidFill>
                 <a:schemeClr val="accent6">
@@ -6444,122 +6990,34 @@
                   </a:schemeClr>
                 </a:solidFill>
               </a:rPr>
-              <a:t>Scenario B:</a:t>
-            </a:r>
-            <a:r>
-              <a:rPr lang="en-US" sz="2400" dirty="0">
-                <a:solidFill>
-                  <a:schemeClr val="accent6">
-                    <a:lumMod val="60000"/>
-                    <a:lumOff val="40000"/>
-                  </a:schemeClr>
-                </a:solidFill>
-              </a:rPr>
-              <a:t> Buy a $50 book, 20% discount, 10% tax.</a:t>
-            </a:r>
-          </a:p>
-          <a:p>
-            <a:pPr lvl="1"/>
-            <a:r>
-              <a:rPr lang="en-US" sz="2400" i="1" dirty="0">
-                <a:solidFill>
-                  <a:schemeClr val="accent6">
-                    <a:lumMod val="60000"/>
-                    <a:lumOff val="40000"/>
-                  </a:schemeClr>
-                </a:solidFill>
-              </a:rPr>
-              <a:t>Reasoning:</a:t>
-            </a:r>
-            <a:r>
-              <a:rPr lang="en-US" sz="2400" dirty="0">
-                <a:solidFill>
-                  <a:schemeClr val="accent6">
-                    <a:lumMod val="60000"/>
-                    <a:lumOff val="40000"/>
-                  </a:schemeClr>
-                </a:solidFill>
-              </a:rPr>
-              <a:t> Discount is $50 * 0.20 = $10. Subtotal is $40. Tax is $40 * 0.10 = $4. Total is $44. </a:t>
-            </a:r>
-            <a:r>
-              <a:rPr lang="en-US" sz="2400" dirty="0">
-                <a:solidFill>
-                  <a:schemeClr val="accent6">
-                    <a:lumMod val="60000"/>
-                    <a:lumOff val="40000"/>
-                  </a:schemeClr>
-                </a:solidFill>
-                <a:hlinkClick r:id="rId3">
-                  <a:extLst>
-                    <a:ext uri="{A12FA001-AC4F-418D-AE19-62706E023703}">
-                      <ahyp:hlinkClr xmlns:ahyp="http://schemas.microsoft.com/office/drawing/2018/hyperlinkcolor" val="tx"/>
-                    </a:ext>
-                  </a:extLst>
-                </a:hlinkClick>
-              </a:rPr>
-              <a:t>1.1.4</a:t>
-            </a:r>
-            <a:endParaRPr lang="en-US" sz="2400" dirty="0">
-              <a:solidFill>
-                <a:schemeClr val="accent6">
-                  <a:lumMod val="60000"/>
-                  <a:lumOff val="40000"/>
-                </a:schemeClr>
-              </a:solidFill>
-            </a:endParaRPr>
-          </a:p>
-          <a:p>
+              <a:t>Chain-of-Thought Instruction:</a:t>
+            </a:r>
+            <a:r>
+              <a:rPr lang="en-US" sz="2400" dirty="0">
+                <a:solidFill>
+                  <a:schemeClr val="accent6">
+                    <a:lumMod val="60000"/>
+                    <a:lumOff val="40000"/>
+                  </a:schemeClr>
+                </a:solidFill>
+              </a:rPr>
+              <a:t> </a:t>
+            </a:r>
+            <a:r>
+              <a:rPr lang="en-US" sz="2400" dirty="0">
+                <a:solidFill>
+                  <a:schemeClr val="accent4">
+                    <a:lumMod val="60000"/>
+                    <a:lumOff val="40000"/>
+                  </a:schemeClr>
+                </a:solidFill>
+              </a:rPr>
+              <a:t>Please </a:t>
+            </a:r>
             <a:r>
               <a:rPr lang="en-US" sz="2400" b="1" dirty="0">
                 <a:solidFill>
-                  <a:schemeClr val="accent6">
-                    <a:lumMod val="60000"/>
-                    <a:lumOff val="40000"/>
-                  </a:schemeClr>
-                </a:solidFill>
-              </a:rPr>
-              <a:t>Task:</a:t>
-            </a:r>
-            <a:r>
-              <a:rPr lang="en-US" sz="2400" dirty="0">
-                <a:solidFill>
-                  <a:schemeClr val="accent6">
-                    <a:lumMod val="60000"/>
-                    <a:lumOff val="40000"/>
-                  </a:schemeClr>
-                </a:solidFill>
-              </a:rPr>
-              <a:t> Now, calculate the final total for a customer buying a laptop for $1,200 with a 15% discount and 7% sales tax.</a:t>
-            </a:r>
-          </a:p>
-          <a:p>
-            <a:r>
-              <a:rPr lang="en-US" sz="2400" b="1" dirty="0">
-                <a:solidFill>
-                  <a:schemeClr val="accent6">
-                    <a:lumMod val="60000"/>
-                    <a:lumOff val="40000"/>
-                  </a:schemeClr>
-                </a:solidFill>
-              </a:rPr>
-              <a:t>Chain-of-Thought Instruction:</a:t>
-            </a:r>
-            <a:r>
-              <a:rPr lang="en-US" sz="2400" dirty="0">
-                <a:solidFill>
-                  <a:schemeClr val="accent6">
-                    <a:lumMod val="60000"/>
-                    <a:lumOff val="40000"/>
-                  </a:schemeClr>
-                </a:solidFill>
-              </a:rPr>
-              <a:t> Please </a:t>
-            </a:r>
-            <a:r>
-              <a:rPr lang="en-US" sz="2400" b="1" dirty="0">
-                <a:solidFill>
-                  <a:schemeClr val="accent6">
+                  <a:schemeClr val="accent4">
                     <a:lumMod val="60000"/>
                     <a:lumOff val="40000"/>
                   </a:schemeClr>
@@ -6570,7 +7028,7 @@
             <a:r>
               <a:rPr lang="en-US" sz="2400" dirty="0">
                 <a:solidFill>
-                  <a:schemeClr val="accent6">
+                  <a:schemeClr val="accent4">
                     <a:lumMod val="60000"/>
                     <a:lumOff val="40000"/>
                   </a:schemeClr>
@@ -6594,7 +7052,7 @@
 </p:sld>
 </file>
 
-<file path=ppt/slides/slide22.xml><?xml version="1.0" encoding="utf-8"?>
+<file path=ppt/slides/slide24.xml><?xml version="1.0" encoding="utf-8"?>
 <p:sld xmlns:a="http://schemas.openxmlformats.org/drawingml/2006/main" xmlns:r="http://schemas.openxmlformats.org/officeDocument/2006/relationships" xmlns:p="http://schemas.openxmlformats.org/presentationml/2006/main">
   <p:cSld>
     <p:spTree>
@@ -6703,7 +7161,7 @@
             <a:r>
               <a:rPr lang="en-US" sz="2400" dirty="0">
                 <a:solidFill>
-                  <a:schemeClr val="accent6">
+                  <a:schemeClr val="accent4">
                     <a:lumMod val="60000"/>
                     <a:lumOff val="40000"/>
                   </a:schemeClr>
@@ -6716,7 +7174,7 @@
             <a:r>
               <a:rPr lang="en-US" sz="2400" dirty="0">
                 <a:solidFill>
-                  <a:schemeClr val="accent6">
+                  <a:schemeClr val="accent4">
                     <a:lumMod val="60000"/>
                     <a:lumOff val="40000"/>
                   </a:schemeClr>
@@ -6729,7 +7187,7 @@
             <a:r>
               <a:rPr lang="en-US" sz="2400" dirty="0">
                 <a:solidFill>
-                  <a:schemeClr val="accent6">
+                  <a:schemeClr val="accent4">
                     <a:lumMod val="60000"/>
                     <a:lumOff val="40000"/>
                   </a:schemeClr>
@@ -6742,7 +7200,7 @@
             <a:r>
               <a:rPr lang="en-US" sz="2400" dirty="0">
                 <a:solidFill>
-                  <a:schemeClr val="accent6">
+                  <a:schemeClr val="accent4">
                     <a:lumMod val="60000"/>
                     <a:lumOff val="40000"/>
                   </a:schemeClr>
@@ -6755,7 +7213,7 @@
             <a:r>
               <a:rPr lang="en-US" sz="2400" dirty="0">
                 <a:solidFill>
-                  <a:schemeClr val="accent6">
+                  <a:schemeClr val="accent4">
                     <a:lumMod val="60000"/>
                     <a:lumOff val="40000"/>
                   </a:schemeClr>
@@ -6768,7 +7226,7 @@
             <a:r>
               <a:rPr lang="en-US" sz="2400" dirty="0">
                 <a:solidFill>
-                  <a:schemeClr val="accent6">
+                  <a:schemeClr val="accent4">
                     <a:lumMod val="60000"/>
                     <a:lumOff val="40000"/>
                   </a:schemeClr>
@@ -6781,7 +7239,7 @@
             <a:r>
               <a:rPr lang="en-US" sz="2400" dirty="0">
                 <a:solidFill>
-                  <a:schemeClr val="accent6">
+                  <a:schemeClr val="accent4">
                     <a:lumMod val="60000"/>
                     <a:lumOff val="40000"/>
                   </a:schemeClr>
@@ -6794,7 +7252,7 @@
             <a:r>
               <a:rPr lang="en-US" sz="2400" dirty="0">
                 <a:solidFill>
-                  <a:schemeClr val="accent6">
+                  <a:schemeClr val="accent4">
                     <a:lumMod val="60000"/>
                     <a:lumOff val="40000"/>
                   </a:schemeClr>
@@ -6807,7 +7265,7 @@
             <a:r>
               <a:rPr lang="en-US" sz="2400" dirty="0">
                 <a:solidFill>
-                  <a:schemeClr val="accent6">
+                  <a:schemeClr val="accent4">
                     <a:lumMod val="60000"/>
                     <a:lumOff val="40000"/>
                   </a:schemeClr>
@@ -6820,7 +7278,7 @@
             <a:r>
               <a:rPr lang="en-US" sz="2400" dirty="0">
                 <a:solidFill>
-                  <a:schemeClr val="accent6">
+                  <a:schemeClr val="accent4">
                     <a:lumMod val="60000"/>
                     <a:lumOff val="40000"/>
                   </a:schemeClr>
@@ -6833,7 +7291,7 @@
             <a:r>
               <a:rPr lang="en-US" sz="2400" dirty="0">
                 <a:solidFill>
-                  <a:schemeClr val="accent6">
+                  <a:schemeClr val="accent4">
                     <a:lumMod val="60000"/>
                     <a:lumOff val="40000"/>
                   </a:schemeClr>
@@ -6846,7 +7304,7 @@
             <a:r>
               <a:rPr lang="en-US" sz="2400" dirty="0">
                 <a:solidFill>
-                  <a:schemeClr val="accent6">
+                  <a:schemeClr val="accent4">
                     <a:lumMod val="60000"/>
                     <a:lumOff val="40000"/>
                   </a:schemeClr>
@@ -6859,7 +7317,7 @@
             <a:r>
               <a:rPr lang="en-US" sz="2400" dirty="0">
                 <a:solidFill>
-                  <a:schemeClr val="accent6">
+                  <a:schemeClr val="accent4">
                     <a:lumMod val="60000"/>
                     <a:lumOff val="40000"/>
                   </a:schemeClr>
@@ -6872,7 +7330,7 @@
             <a:r>
               <a:rPr lang="en-US" sz="2400" dirty="0">
                 <a:solidFill>
-                  <a:schemeClr val="accent6">
+                  <a:schemeClr val="accent4">
                     <a:lumMod val="60000"/>
                     <a:lumOff val="40000"/>
                   </a:schemeClr>
@@ -6896,7 +7354,7 @@
 </p:sld>
 </file>
 
-<file path=ppt/slides/slide23.xml><?xml version="1.0" encoding="utf-8"?>
+<file path=ppt/slides/slide25.xml><?xml version="1.0" encoding="utf-8"?>
 <p:sld xmlns:a="http://schemas.openxmlformats.org/drawingml/2006/main" xmlns:r="http://schemas.openxmlformats.org/officeDocument/2006/relationships" xmlns:p="http://schemas.openxmlformats.org/presentationml/2006/main">
   <p:cSld>
     <p:spTree>
@@ -6970,7 +7428,7 @@
         <p:spPr>
           <a:xfrm>
             <a:off x="594360" y="962098"/>
-            <a:ext cx="10780776" cy="2677656"/>
+            <a:ext cx="4736592" cy="2677656"/>
           </a:xfrm>
           <a:prstGeom prst="rect">
             <a:avLst/>
@@ -7132,8 +7590,8 @@
         </p:nvSpPr>
         <p:spPr>
           <a:xfrm>
-            <a:off x="594360" y="962098"/>
-            <a:ext cx="10780776" cy="2677656"/>
+            <a:off x="374904" y="221434"/>
+            <a:ext cx="6848856" cy="3046988"/>
           </a:xfrm>
           <a:prstGeom prst="rect">
             <a:avLst/>
@@ -7155,7 +7613,7 @@
                   </a:schemeClr>
                 </a:solidFill>
               </a:rPr>
-              <a:t>Example Without Few-Shot Prompting</a:t>
+              <a:t>Example: Without Few-Shot Prompting</a:t>
             </a:r>
           </a:p>
           <a:p>
@@ -7185,7 +7643,7 @@
             <a:r>
               <a:rPr lang="en-US" sz="2400" dirty="0">
                 <a:solidFill>
-                  <a:schemeClr val="accent6">
+                  <a:schemeClr val="accent4">
                     <a:lumMod val="60000"/>
                     <a:lumOff val="40000"/>
                   </a:schemeClr>
@@ -7198,7 +7656,7 @@
             <a:r>
               <a:rPr lang="en-US" sz="2400" dirty="0">
                 <a:solidFill>
-                  <a:schemeClr val="accent6">
+                  <a:schemeClr val="accent4">
                     <a:lumMod val="60000"/>
                     <a:lumOff val="40000"/>
                   </a:schemeClr>
@@ -7232,6 +7690,36 @@
           </a:p>
         </p:txBody>
       </p:sp>
+      <p:pic>
+        <p:nvPicPr>
+          <p:cNvPr id="3" name="Picture 2">
+            <a:extLst>
+              <a:ext uri="{FF2B5EF4-FFF2-40B4-BE49-F238E27FC236}">
+                <a16:creationId xmlns:a16="http://schemas.microsoft.com/office/drawing/2014/main" id="{1DB84AF7-3B80-70F9-E02E-935B63197C4C}"/>
+              </a:ext>
+            </a:extLst>
+          </p:cNvPr>
+          <p:cNvPicPr>
+            <a:picLocks noChangeAspect="1"/>
+          </p:cNvPicPr>
+          <p:nvPr/>
+        </p:nvPicPr>
+        <p:blipFill>
+          <a:blip r:embed="rId2"/>
+          <a:stretch>
+            <a:fillRect/>
+          </a:stretch>
+        </p:blipFill>
+        <p:spPr>
+          <a:xfrm>
+            <a:off x="2783112" y="4005072"/>
+            <a:ext cx="7687512" cy="746223"/>
+          </a:xfrm>
+          <a:prstGeom prst="rect">
+            <a:avLst/>
+          </a:prstGeom>
+        </p:spPr>
+      </p:pic>
     </p:spTree>
     <p:extLst>
       <p:ext uri="{BB962C8B-B14F-4D97-AF65-F5344CB8AC3E}">
@@ -7305,7 +7793,7 @@
                   </a:schemeClr>
                 </a:solidFill>
               </a:rPr>
-              <a:t>Example With Few-Shot Prompting</a:t>
+              <a:t>Example: With Few-Shot Prompting</a:t>
             </a:r>
             <a:endParaRPr lang="en-US" sz="2400" dirty="0">
               <a:solidFill>
@@ -7669,7 +8157,7 @@
                   </a:schemeClr>
                 </a:solidFill>
               </a:rPr>
-              <a:t>Example With Few-Shot Prompting</a:t>
+              <a:t>Example : With Few-Shot Prompting</a:t>
             </a:r>
             <a:endParaRPr lang="en-US" sz="2400" dirty="0">
               <a:solidFill>
@@ -8054,7 +8542,29 @@
                   </a:schemeClr>
                 </a:solidFill>
               </a:rPr>
-              <a:t>AI models learn patterns very effectively. When we provide examples:</a:t>
+              <a:t>AI models learn </a:t>
+            </a:r>
+            <a:r>
+              <a:rPr lang="en-US" sz="2400" b="1" u="sng" dirty="0">
+                <a:solidFill>
+                  <a:schemeClr val="accent6">
+                    <a:lumMod val="60000"/>
+                    <a:lumOff val="40000"/>
+                  </a:schemeClr>
+                </a:solidFill>
+              </a:rPr>
+              <a:t>patterns very effectively</a:t>
+            </a:r>
+            <a:r>
+              <a:rPr lang="en-US" sz="2400" dirty="0">
+                <a:solidFill>
+                  <a:schemeClr val="accent6">
+                    <a:lumMod val="60000"/>
+                    <a:lumOff val="40000"/>
+                  </a:schemeClr>
+                </a:solidFill>
+              </a:rPr>
+              <a:t>. When we provide examples:</a:t>
             </a:r>
           </a:p>
           <a:p>
@@ -8099,7 +8609,7 @@
                   </a:schemeClr>
                 </a:solidFill>
               </a:rPr>
-              <a:t>AI maintains consistency and  produces more accurate responses</a:t>
+              <a:t>AI produces more accurate responses</a:t>
             </a:r>
           </a:p>
         </p:txBody>
